--- a/artifacts/pitch-packs/sobha-realty/sobha_4c360_one_page_leavebehind.pptx
+++ b/artifacts/pitch-packs/sobha-realty/sobha_4c360_one_page_leavebehind.pptx
@@ -2,13 +2,13 @@
 <file path=ppt/presentation.xml><?xml version="1.0" encoding="utf-8"?>
 <p:presentation xmlns:p="http://schemas.openxmlformats.org/presentationml/2006/main">
   <p:sldMasterIdLst>
-    <p:sldMasterId xmlns:r="http://schemas.openxmlformats.org/officeDocument/2006/relationships" id="2147483648" r:id="R9694b63349204c5c"/>
+    <p:sldMasterId xmlns:r="http://schemas.openxmlformats.org/officeDocument/2006/relationships" id="2147483648" r:id="R9abd73cf0ecc4751"/>
   </p:sldMasterIdLst>
   <p:notesMasterIdLst>
-    <p:notesMasterId xmlns:r="http://schemas.openxmlformats.org/officeDocument/2006/relationships" r:id="R42ac4d91a1d04b59"/>
+    <p:notesMasterId xmlns:r="http://schemas.openxmlformats.org/officeDocument/2006/relationships" r:id="R4d4910879a6f42dc"/>
   </p:notesMasterIdLst>
   <p:sldIdLst>
-    <p:sldId xmlns:r="http://schemas.openxmlformats.org/officeDocument/2006/relationships" id="256" r:id="R3d815c2253ef4f70"/>
+    <p:sldId xmlns:r="http://schemas.openxmlformats.org/officeDocument/2006/relationships" id="256" r:id="R6e4ad6dab9da41f2"/>
   </p:sldIdLst>
   <p:sldSz cx="18288000" cy="10287000"/>
   <p:notesSz cx="6858000" cy="9144000"/>
@@ -555,7 +555,7 @@
   </p:cSld>
   <p:clrMap bg1="lt1" tx1="dk1" bg2="lt2" tx2="dk2" accent1="accent1" accent2="accent2" accent3="accent3" accent4="accent4" accent5="accent5" accent6="accent6" hlink="hlink" folHlink="folHlink"/>
   <p:sldLayoutIdLst>
-    <p:sldLayoutId xmlns:r="http://schemas.openxmlformats.org/officeDocument/2006/relationships" id="2147483649" r:id="R8ac4efd0ed6c4837"/>
+    <p:sldLayoutId xmlns:r="http://schemas.openxmlformats.org/officeDocument/2006/relationships" id="2147483649" r:id="R043f84a22fd1409f"/>
   </p:sldLayoutIdLst>
   <p:txStyles>
     <p:titleStyle>
@@ -854,7 +854,7 @@
           <p:cNvPr id="1" name="">
             <a:extLst xmlns:a="http://schemas.openxmlformats.org/drawingml/2006/main">
               <a:ext uri="{FF2B5EF4-FFF2-40B4-BE49-F238E27FC236}">
-                <a16:creationId xmlns:a16="http://schemas.microsoft.com/office/drawing/2014/main" id="{D55170E5-3850-4B29-9DB6-7AE24D2BB452}"/>
+                <a16:creationId xmlns:a16="http://schemas.microsoft.com/office/drawing/2014/main" id="{EF6DECDB-3DC9-4F27-9470-CCD96DDCF695}"/>
               </a:ext>
             </a:extLst>
           </p:cNvPr>
@@ -881,7 +881,7 @@
           <p:cNvPr id="2" name="">
             <a:extLst xmlns:a="http://schemas.openxmlformats.org/drawingml/2006/main">
               <a:ext uri="{FF2B5EF4-FFF2-40B4-BE49-F238E27FC236}">
-                <a16:creationId xmlns:a16="http://schemas.microsoft.com/office/drawing/2014/main" id="{9D6E304D-FD9D-4A5D-84AA-079181AFC11A}"/>
+                <a16:creationId xmlns:a16="http://schemas.microsoft.com/office/drawing/2014/main" id="{95917BCC-8BF1-4EEA-907C-F93DEDA70640}"/>
               </a:ext>
             </a:extLst>
           </p:cNvPr>
@@ -926,7 +926,7 @@
           <p:cNvPr id="3" name="">
             <a:extLst xmlns:a="http://schemas.openxmlformats.org/drawingml/2006/main">
               <a:ext uri="{FF2B5EF4-FFF2-40B4-BE49-F238E27FC236}">
-                <a16:creationId xmlns:a16="http://schemas.microsoft.com/office/drawing/2014/main" id="{55FE6155-EBC5-49EB-84AB-1918EBAF5E44}"/>
+                <a16:creationId xmlns:a16="http://schemas.microsoft.com/office/drawing/2014/main" id="{EA9A34AB-0FD2-4D4D-B628-13EF9BF90357}"/>
               </a:ext>
             </a:extLst>
           </p:cNvPr>
@@ -971,7 +971,7 @@
           <p:cNvPr id="4" name="">
             <a:extLst xmlns:a="http://schemas.openxmlformats.org/drawingml/2006/main">
               <a:ext uri="{FF2B5EF4-FFF2-40B4-BE49-F238E27FC236}">
-                <a16:creationId xmlns:a16="http://schemas.microsoft.com/office/drawing/2014/main" id="{67B55886-314C-406B-A09E-B8DF8906F5B2}"/>
+                <a16:creationId xmlns:a16="http://schemas.microsoft.com/office/drawing/2014/main" id="{46FC9550-B580-4304-901F-0EE7F8B32CB4}"/>
               </a:ext>
             </a:extLst>
           </p:cNvPr>
@@ -1002,7 +1002,7 @@
           <p:cNvPr id="5" name="">
             <a:extLst xmlns:a="http://schemas.openxmlformats.org/drawingml/2006/main">
               <a:ext uri="{FF2B5EF4-FFF2-40B4-BE49-F238E27FC236}">
-                <a16:creationId xmlns:a16="http://schemas.microsoft.com/office/drawing/2014/main" id="{FAE90986-59CC-4EF1-A14B-B46E8EBBFD30}"/>
+                <a16:creationId xmlns:a16="http://schemas.microsoft.com/office/drawing/2014/main" id="{5F5DE043-BBA9-4105-9ACD-7D602C568D78}"/>
               </a:ext>
             </a:extLst>
           </p:cNvPr>
@@ -1047,7 +1047,7 @@
           <p:cNvPr id="6" name="">
             <a:extLst xmlns:a="http://schemas.openxmlformats.org/drawingml/2006/main">
               <a:ext uri="{FF2B5EF4-FFF2-40B4-BE49-F238E27FC236}">
-                <a16:creationId xmlns:a16="http://schemas.microsoft.com/office/drawing/2014/main" id="{67272507-850D-4690-8557-B337D1F8943A}"/>
+                <a16:creationId xmlns:a16="http://schemas.microsoft.com/office/drawing/2014/main" id="{4E900E1F-5BDD-4F0F-808B-C8BE3AA3AB85}"/>
               </a:ext>
             </a:extLst>
           </p:cNvPr>
@@ -1080,7 +1080,7 @@
           <p:cNvPr id="7" name="">
             <a:extLst xmlns:a="http://schemas.openxmlformats.org/drawingml/2006/main">
               <a:ext uri="{FF2B5EF4-FFF2-40B4-BE49-F238E27FC236}">
-                <a16:creationId xmlns:a16="http://schemas.microsoft.com/office/drawing/2014/main" id="{104B3E49-6162-43B0-8853-9FDA8A10EEC6}"/>
+                <a16:creationId xmlns:a16="http://schemas.microsoft.com/office/drawing/2014/main" id="{5FC98B48-E9A0-4B7E-B234-584A29EE9FCE}"/>
               </a:ext>
             </a:extLst>
           </p:cNvPr>
@@ -1125,7 +1125,7 @@
           <p:cNvPr id="8" name="">
             <a:extLst xmlns:a="http://schemas.openxmlformats.org/drawingml/2006/main">
               <a:ext uri="{FF2B5EF4-FFF2-40B4-BE49-F238E27FC236}">
-                <a16:creationId xmlns:a16="http://schemas.microsoft.com/office/drawing/2014/main" id="{D9AB101A-4CBD-41CE-9032-2AA848536C1A}"/>
+                <a16:creationId xmlns:a16="http://schemas.microsoft.com/office/drawing/2014/main" id="{23DD6E27-FCC5-4BE3-8820-5A8886F74700}"/>
               </a:ext>
             </a:extLst>
           </p:cNvPr>
@@ -1170,7 +1170,7 @@
           <p:cNvPr id="9" name="">
             <a:extLst xmlns:a="http://schemas.openxmlformats.org/drawingml/2006/main">
               <a:ext uri="{FF2B5EF4-FFF2-40B4-BE49-F238E27FC236}">
-                <a16:creationId xmlns:a16="http://schemas.microsoft.com/office/drawing/2014/main" id="{D324BBDE-3226-454E-AFDB-6EADAAB917BD}"/>
+                <a16:creationId xmlns:a16="http://schemas.microsoft.com/office/drawing/2014/main" id="{059A6783-FE78-4A40-AAB9-0614DCCB4C13}"/>
               </a:ext>
             </a:extLst>
           </p:cNvPr>
@@ -1215,7 +1215,7 @@
           <p:cNvPr id="10" name="">
             <a:extLst xmlns:a="http://schemas.openxmlformats.org/drawingml/2006/main">
               <a:ext uri="{FF2B5EF4-FFF2-40B4-BE49-F238E27FC236}">
-                <a16:creationId xmlns:a16="http://schemas.microsoft.com/office/drawing/2014/main" id="{6003207B-6D92-4DB3-87B2-80CB6BCE0BA7}"/>
+                <a16:creationId xmlns:a16="http://schemas.microsoft.com/office/drawing/2014/main" id="{97EF5012-94B5-44C4-BDB6-ED2E4DD53136}"/>
               </a:ext>
             </a:extLst>
           </p:cNvPr>
@@ -1260,7 +1260,7 @@
           <p:cNvPr id="11" name="">
             <a:extLst xmlns:a="http://schemas.openxmlformats.org/drawingml/2006/main">
               <a:ext uri="{FF2B5EF4-FFF2-40B4-BE49-F238E27FC236}">
-                <a16:creationId xmlns:a16="http://schemas.microsoft.com/office/drawing/2014/main" id="{4CA7923A-2D1B-4410-97D4-9CF179065EC7}"/>
+                <a16:creationId xmlns:a16="http://schemas.microsoft.com/office/drawing/2014/main" id="{CA04B75A-20FA-418B-BFCB-701DBAC140A3}"/>
               </a:ext>
             </a:extLst>
           </p:cNvPr>
@@ -1289,7 +1289,7 @@
           <p:cNvPr id="12" name="">
             <a:extLst xmlns:a="http://schemas.openxmlformats.org/drawingml/2006/main">
               <a:ext uri="{FF2B5EF4-FFF2-40B4-BE49-F238E27FC236}">
-                <a16:creationId xmlns:a16="http://schemas.microsoft.com/office/drawing/2014/main" id="{8A78D792-0AAE-4F4E-9560-86BEF745C263}"/>
+                <a16:creationId xmlns:a16="http://schemas.microsoft.com/office/drawing/2014/main" id="{8B30BD52-7000-40B4-A497-47BDD4191364}"/>
               </a:ext>
             </a:extLst>
           </p:cNvPr>
@@ -1334,7 +1334,7 @@
           <p:cNvPr id="13" name="">
             <a:extLst xmlns:a="http://schemas.openxmlformats.org/drawingml/2006/main">
               <a:ext uri="{FF2B5EF4-FFF2-40B4-BE49-F238E27FC236}">
-                <a16:creationId xmlns:a16="http://schemas.microsoft.com/office/drawing/2014/main" id="{04182E1A-ED47-43A0-9CAA-46C4E9E6837F}"/>
+                <a16:creationId xmlns:a16="http://schemas.microsoft.com/office/drawing/2014/main" id="{A8A57FED-386B-4040-A4F3-33522601A526}"/>
               </a:ext>
             </a:extLst>
           </p:cNvPr>
@@ -1379,7 +1379,7 @@
           <p:cNvPr id="14" name="">
             <a:extLst xmlns:a="http://schemas.openxmlformats.org/drawingml/2006/main">
               <a:ext uri="{FF2B5EF4-FFF2-40B4-BE49-F238E27FC236}">
-                <a16:creationId xmlns:a16="http://schemas.microsoft.com/office/drawing/2014/main" id="{7316A4E9-2A3A-45B5-B1E0-3B9471A3D534}"/>
+                <a16:creationId xmlns:a16="http://schemas.microsoft.com/office/drawing/2014/main" id="{3E093EA3-0558-48D8-92C9-A594B0096DF2}"/>
               </a:ext>
             </a:extLst>
           </p:cNvPr>
@@ -1424,7 +1424,7 @@
           <p:cNvPr id="15" name="">
             <a:extLst xmlns:a="http://schemas.openxmlformats.org/drawingml/2006/main">
               <a:ext uri="{FF2B5EF4-FFF2-40B4-BE49-F238E27FC236}">
-                <a16:creationId xmlns:a16="http://schemas.microsoft.com/office/drawing/2014/main" id="{DF87DF84-6E44-4C2A-9E13-ABC616B10069}"/>
+                <a16:creationId xmlns:a16="http://schemas.microsoft.com/office/drawing/2014/main" id="{B832ECB1-0134-4F87-AE44-7779FB29B2C8}"/>
               </a:ext>
             </a:extLst>
           </p:cNvPr>
@@ -1469,7 +1469,7 @@
           <p:cNvPr id="16" name="">
             <a:extLst xmlns:a="http://schemas.openxmlformats.org/drawingml/2006/main">
               <a:ext uri="{FF2B5EF4-FFF2-40B4-BE49-F238E27FC236}">
-                <a16:creationId xmlns:a16="http://schemas.microsoft.com/office/drawing/2014/main" id="{E7F4594C-0135-40FB-B73C-D260D616B1BD}"/>
+                <a16:creationId xmlns:a16="http://schemas.microsoft.com/office/drawing/2014/main" id="{8DAA8FFB-29AC-43BB-B94E-83ACB48E0323}"/>
               </a:ext>
             </a:extLst>
           </p:cNvPr>
@@ -1514,7 +1514,7 @@
           <p:cNvPr id="17" name="">
             <a:extLst xmlns:a="http://schemas.openxmlformats.org/drawingml/2006/main">
               <a:ext uri="{FF2B5EF4-FFF2-40B4-BE49-F238E27FC236}">
-                <a16:creationId xmlns:a16="http://schemas.microsoft.com/office/drawing/2014/main" id="{9CCB7097-2593-48BC-BBFA-CD9D73A4D3EB}"/>
+                <a16:creationId xmlns:a16="http://schemas.microsoft.com/office/drawing/2014/main" id="{6C4B0972-BE45-441D-BAA4-1ED4A259DB18}"/>
               </a:ext>
             </a:extLst>
           </p:cNvPr>
@@ -1559,7 +1559,7 @@
           <p:cNvPr id="18" name="">
             <a:extLst xmlns:a="http://schemas.openxmlformats.org/drawingml/2006/main">
               <a:ext uri="{FF2B5EF4-FFF2-40B4-BE49-F238E27FC236}">
-                <a16:creationId xmlns:a16="http://schemas.microsoft.com/office/drawing/2014/main" id="{09E4290B-A866-4D79-B2EA-50A4B4675545}"/>
+                <a16:creationId xmlns:a16="http://schemas.microsoft.com/office/drawing/2014/main" id="{E05D4099-8C24-4A02-9ACD-64A668A25D83}"/>
               </a:ext>
             </a:extLst>
           </p:cNvPr>
@@ -1604,7 +1604,7 @@
           <p:cNvPr id="19" name="">
             <a:extLst xmlns:a="http://schemas.openxmlformats.org/drawingml/2006/main">
               <a:ext uri="{FF2B5EF4-FFF2-40B4-BE49-F238E27FC236}">
-                <a16:creationId xmlns:a16="http://schemas.microsoft.com/office/drawing/2014/main" id="{87B2BCD3-C2C6-4081-AEA4-6A27DF94FA96}"/>
+                <a16:creationId xmlns:a16="http://schemas.microsoft.com/office/drawing/2014/main" id="{559579D3-D219-4353-B746-1BE71D6F7ECE}"/>
               </a:ext>
             </a:extLst>
           </p:cNvPr>
@@ -1649,7 +1649,7 @@
           <p:cNvPr id="20" name="">
             <a:extLst xmlns:a="http://schemas.openxmlformats.org/drawingml/2006/main">
               <a:ext uri="{FF2B5EF4-FFF2-40B4-BE49-F238E27FC236}">
-                <a16:creationId xmlns:a16="http://schemas.microsoft.com/office/drawing/2014/main" id="{8654BDEA-8091-494E-8336-86FEB1931EED}"/>
+                <a16:creationId xmlns:a16="http://schemas.microsoft.com/office/drawing/2014/main" id="{E70EC581-7267-4C99-BA5C-B28858E1FA06}"/>
               </a:ext>
             </a:extLst>
           </p:cNvPr>
@@ -1694,7 +1694,7 @@
           <p:cNvPr id="21" name="">
             <a:extLst xmlns:a="http://schemas.openxmlformats.org/drawingml/2006/main">
               <a:ext uri="{FF2B5EF4-FFF2-40B4-BE49-F238E27FC236}">
-                <a16:creationId xmlns:a16="http://schemas.microsoft.com/office/drawing/2014/main" id="{F8CAC509-3980-4DA0-9FBC-D6133E061F13}"/>
+                <a16:creationId xmlns:a16="http://schemas.microsoft.com/office/drawing/2014/main" id="{00F5DEBA-6B4E-4000-86DF-F4E00A60D527}"/>
               </a:ext>
             </a:extLst>
           </p:cNvPr>
@@ -1739,7 +1739,7 @@
           <p:cNvPr id="22" name="">
             <a:extLst xmlns:a="http://schemas.openxmlformats.org/drawingml/2006/main">
               <a:ext uri="{FF2B5EF4-FFF2-40B4-BE49-F238E27FC236}">
-                <a16:creationId xmlns:a16="http://schemas.microsoft.com/office/drawing/2014/main" id="{3B314BF8-4545-441D-A6BD-A489E13D8F61}"/>
+                <a16:creationId xmlns:a16="http://schemas.microsoft.com/office/drawing/2014/main" id="{EE72747C-F8B1-40FF-83BF-4B9FAD6261D5}"/>
               </a:ext>
             </a:extLst>
           </p:cNvPr>
@@ -1784,7 +1784,7 @@
           <p:cNvPr id="23" name="">
             <a:extLst xmlns:a="http://schemas.openxmlformats.org/drawingml/2006/main">
               <a:ext uri="{FF2B5EF4-FFF2-40B4-BE49-F238E27FC236}">
-                <a16:creationId xmlns:a16="http://schemas.microsoft.com/office/drawing/2014/main" id="{4048FE70-B994-4220-A8E1-3369D7F159EA}"/>
+                <a16:creationId xmlns:a16="http://schemas.microsoft.com/office/drawing/2014/main" id="{D3CFC113-D25A-46D7-A76B-48202A43E1E6}"/>
               </a:ext>
             </a:extLst>
           </p:cNvPr>
@@ -1829,7 +1829,7 @@
           <p:cNvPr id="24" name="">
             <a:extLst xmlns:a="http://schemas.openxmlformats.org/drawingml/2006/main">
               <a:ext uri="{FF2B5EF4-FFF2-40B4-BE49-F238E27FC236}">
-                <a16:creationId xmlns:a16="http://schemas.microsoft.com/office/drawing/2014/main" id="{9A1C8BFD-7BBE-4760-826A-C817186568D8}"/>
+                <a16:creationId xmlns:a16="http://schemas.microsoft.com/office/drawing/2014/main" id="{C46BCDF5-3C83-4F2B-9C47-58DFFF314EFA}"/>
               </a:ext>
             </a:extLst>
           </p:cNvPr>
@@ -1862,7 +1862,7 @@
           <p:cNvPr id="25" name="">
             <a:extLst xmlns:a="http://schemas.openxmlformats.org/drawingml/2006/main">
               <a:ext uri="{FF2B5EF4-FFF2-40B4-BE49-F238E27FC236}">
-                <a16:creationId xmlns:a16="http://schemas.microsoft.com/office/drawing/2014/main" id="{17DCB1F6-D519-43A8-BF99-F46783DBFFF0}"/>
+                <a16:creationId xmlns:a16="http://schemas.microsoft.com/office/drawing/2014/main" id="{5BBA3414-0720-4C36-A526-D68408C485DC}"/>
               </a:ext>
             </a:extLst>
           </p:cNvPr>
@@ -1907,7 +1907,7 @@
           <p:cNvPr id="26" name="">
             <a:extLst xmlns:a="http://schemas.openxmlformats.org/drawingml/2006/main">
               <a:ext uri="{FF2B5EF4-FFF2-40B4-BE49-F238E27FC236}">
-                <a16:creationId xmlns:a16="http://schemas.microsoft.com/office/drawing/2014/main" id="{A5EE7FD2-A9A5-461E-BEE6-F8F81A1FE702}"/>
+                <a16:creationId xmlns:a16="http://schemas.microsoft.com/office/drawing/2014/main" id="{B2DFE784-BF97-411A-AA3B-EC9E72AFE487}"/>
               </a:ext>
             </a:extLst>
           </p:cNvPr>
@@ -1950,7 +1950,7 @@
     </p:spTree>
     <p:extLst>
       <p:ext uri="{BB962C8B-B14F-4D97-AF65-F5344CB8AC3E}">
-        <p14:creationId xmlns:p14="http://schemas.microsoft.com/office/powerpoint/2010/main" val="432574749"/>
+        <p14:creationId xmlns:p14="http://schemas.microsoft.com/office/powerpoint/2010/main" val="1473954618"/>
       </p:ext>
     </p:extLst>
   </p:cSld>
